--- a/src/images/NaRuTagAI.pptx
+++ b/src/images/NaRuTagAI.pptx
@@ -5,7 +5,7 @@
     <p:sldMasterId id="2147483675" r:id="rId1"/>
   </p:sldMasterIdLst>
   <p:notesMasterIdLst>
-    <p:notesMasterId r:id="rId10"/>
+    <p:notesMasterId r:id="rId9"/>
   </p:notesMasterIdLst>
   <p:sldIdLst>
     <p:sldId id="256" r:id="rId2"/>
@@ -13,26 +13,25 @@
     <p:sldId id="267" r:id="rId4"/>
     <p:sldId id="313" r:id="rId5"/>
     <p:sldId id="315" r:id="rId6"/>
-    <p:sldId id="263" r:id="rId7"/>
-    <p:sldId id="314" r:id="rId8"/>
-    <p:sldId id="282" r:id="rId9"/>
+    <p:sldId id="314" r:id="rId7"/>
+    <p:sldId id="282" r:id="rId8"/>
   </p:sldIdLst>
   <p:sldSz cx="9144000" cy="5143500" type="screen16x9"/>
   <p:notesSz cx="6858000" cy="9144000"/>
   <p:embeddedFontLst>
     <p:embeddedFont>
       <p:font typeface="Montserrat" panose="00000500000000000000" pitchFamily="2" charset="-52"/>
-      <p:regular r:id="rId11"/>
-      <p:bold r:id="rId12"/>
-      <p:italic r:id="rId13"/>
-      <p:boldItalic r:id="rId14"/>
+      <p:regular r:id="rId10"/>
+      <p:bold r:id="rId11"/>
+      <p:italic r:id="rId12"/>
+      <p:boldItalic r:id="rId13"/>
     </p:embeddedFont>
     <p:embeddedFont>
       <p:font typeface="Montserrat SemiBold" panose="00000700000000000000" pitchFamily="2" charset="-52"/>
-      <p:regular r:id="rId15"/>
-      <p:bold r:id="rId16"/>
-      <p:italic r:id="rId17"/>
-      <p:boldItalic r:id="rId18"/>
+      <p:regular r:id="rId14"/>
+      <p:bold r:id="rId15"/>
+      <p:italic r:id="rId16"/>
+      <p:boldItalic r:id="rId17"/>
     </p:embeddedFont>
   </p:embeddedFontLst>
   <p:defaultTextStyle>
@@ -1253,110 +1252,6 @@
   <p:cSld>
     <p:spTree>
       <p:nvGrpSpPr>
-        <p:cNvPr id="1" name="Shape 247"/>
-        <p:cNvGrpSpPr/>
-        <p:nvPr/>
-      </p:nvGrpSpPr>
-      <p:grpSpPr>
-        <a:xfrm>
-          <a:off x="0" y="0"/>
-          <a:ext cx="0" cy="0"/>
-          <a:chOff x="0" y="0"/>
-          <a:chExt cx="0" cy="0"/>
-        </a:xfrm>
-      </p:grpSpPr>
-      <p:sp>
-        <p:nvSpPr>
-          <p:cNvPr id="248" name="Google Shape;248;ga9fa940987_0_23:notes"/>
-          <p:cNvSpPr>
-            <a:spLocks noGrp="1" noRot="1" noChangeAspect="1"/>
-          </p:cNvSpPr>
-          <p:nvPr>
-            <p:ph type="sldImg" idx="2"/>
-          </p:nvPr>
-        </p:nvSpPr>
-        <p:spPr>
-          <a:xfrm>
-            <a:off x="381000" y="685800"/>
-            <a:ext cx="6096000" cy="3429000"/>
-          </a:xfrm>
-          <a:custGeom>
-            <a:avLst/>
-            <a:gdLst/>
-            <a:ahLst/>
-            <a:cxnLst/>
-            <a:rect l="l" t="t" r="r" b="b"/>
-            <a:pathLst>
-              <a:path w="120000" h="120000" extrusionOk="0">
-                <a:moveTo>
-                  <a:pt x="0" y="0"/>
-                </a:moveTo>
-                <a:lnTo>
-                  <a:pt x="120000" y="0"/>
-                </a:lnTo>
-                <a:lnTo>
-                  <a:pt x="120000" y="120000"/>
-                </a:lnTo>
-                <a:lnTo>
-                  <a:pt x="0" y="120000"/>
-                </a:lnTo>
-                <a:close/>
-              </a:path>
-            </a:pathLst>
-          </a:custGeom>
-        </p:spPr>
-      </p:sp>
-      <p:sp>
-        <p:nvSpPr>
-          <p:cNvPr id="249" name="Google Shape;249;ga9fa940987_0_23:notes"/>
-          <p:cNvSpPr txBox="1">
-            <a:spLocks noGrp="1"/>
-          </p:cNvSpPr>
-          <p:nvPr>
-            <p:ph type="body" idx="1"/>
-          </p:nvPr>
-        </p:nvSpPr>
-        <p:spPr>
-          <a:xfrm>
-            <a:off x="685800" y="4343400"/>
-            <a:ext cx="5486400" cy="4114800"/>
-          </a:xfrm>
-          <a:prstGeom prst="rect">
-            <a:avLst/>
-          </a:prstGeom>
-        </p:spPr>
-        <p:txBody>
-          <a:bodyPr spcFirstLastPara="1" wrap="square" lIns="91425" tIns="91425" rIns="91425" bIns="91425" anchor="t" anchorCtr="0">
-            <a:noAutofit/>
-          </a:bodyPr>
-          <a:lstStyle/>
-          <a:p>
-            <a:pPr marL="0" lvl="0" indent="0" algn="l" rtl="0">
-              <a:spcBef>
-                <a:spcPts val="0"/>
-              </a:spcBef>
-              <a:spcAft>
-                <a:spcPts val="0"/>
-              </a:spcAft>
-              <a:buNone/>
-            </a:pPr>
-            <a:endParaRPr/>
-          </a:p>
-        </p:txBody>
-      </p:sp>
-    </p:spTree>
-  </p:cSld>
-  <p:clrMapOvr>
-    <a:masterClrMapping/>
-  </p:clrMapOvr>
-</p:notes>
-</file>
-
-<file path=ppt/notesSlides/notesSlide7.xml><?xml version="1.0" encoding="utf-8"?>
-<p:notes xmlns:a="http://schemas.openxmlformats.org/drawingml/2006/main" xmlns:r="http://schemas.openxmlformats.org/officeDocument/2006/relationships" xmlns:p="http://schemas.openxmlformats.org/presentationml/2006/main" showMasterSp="0" showMasterPhAnim="0">
-  <p:cSld>
-    <p:spTree>
-      <p:nvGrpSpPr>
         <p:cNvPr id="1" name="Shape 375"/>
         <p:cNvGrpSpPr/>
         <p:nvPr/>
@@ -1461,7 +1356,7 @@
 </p:notes>
 </file>
 
-<file path=ppt/notesSlides/notesSlide8.xml><?xml version="1.0" encoding="utf-8"?>
+<file path=ppt/notesSlides/notesSlide7.xml><?xml version="1.0" encoding="utf-8"?>
 <p:notes xmlns:a="http://schemas.openxmlformats.org/drawingml/2006/main" xmlns:r="http://schemas.openxmlformats.org/officeDocument/2006/relationships" xmlns:p="http://schemas.openxmlformats.org/presentationml/2006/main" showMasterSp="0" showMasterPhAnim="0">
   <p:cSld>
     <p:spTree>
@@ -9601,124 +9496,6 @@
       </p:grpSpPr>
       <p:sp>
         <p:nvSpPr>
-          <p:cNvPr id="17" name="Прямоугольник: скругленные углы 16">
-            <a:extLst>
-              <a:ext uri="{FF2B5EF4-FFF2-40B4-BE49-F238E27FC236}">
-                <a16:creationId xmlns:a16="http://schemas.microsoft.com/office/drawing/2014/main" id="{51CC8A4F-ECC8-4E09-8F37-6DD3B5B05637}"/>
-              </a:ext>
-            </a:extLst>
-          </p:cNvPr>
-          <p:cNvSpPr/>
-          <p:nvPr/>
-        </p:nvSpPr>
-        <p:spPr>
-          <a:xfrm>
-            <a:off x="7342787" y="3477600"/>
-            <a:ext cx="1714813" cy="583200"/>
-          </a:xfrm>
-          <a:prstGeom prst="roundRect">
-            <a:avLst/>
-          </a:prstGeom>
-          <a:solidFill>
-            <a:schemeClr val="accent5">
-              <a:lumMod val="60000"/>
-              <a:lumOff val="40000"/>
-            </a:schemeClr>
-          </a:solidFill>
-          <a:ln>
-            <a:solidFill>
-              <a:schemeClr val="accent5">
-                <a:lumMod val="60000"/>
-                <a:lumOff val="40000"/>
-              </a:schemeClr>
-            </a:solidFill>
-          </a:ln>
-        </p:spPr>
-        <p:style>
-          <a:lnRef idx="2">
-            <a:schemeClr val="accent1">
-              <a:shade val="50000"/>
-            </a:schemeClr>
-          </a:lnRef>
-          <a:fillRef idx="1">
-            <a:schemeClr val="accent1"/>
-          </a:fillRef>
-          <a:effectRef idx="0">
-            <a:schemeClr val="accent1"/>
-          </a:effectRef>
-          <a:fontRef idx="minor">
-            <a:schemeClr val="lt1"/>
-          </a:fontRef>
-        </p:style>
-        <p:txBody>
-          <a:bodyPr rtlCol="0" anchor="ctr"/>
-          <a:lstStyle/>
-          <a:p>
-            <a:pPr algn="ctr"/>
-            <a:endParaRPr lang="ru-RU"/>
-          </a:p>
-        </p:txBody>
-      </p:sp>
-      <p:sp>
-        <p:nvSpPr>
-          <p:cNvPr id="15" name="Прямоугольник: скругленные углы 14">
-            <a:extLst>
-              <a:ext uri="{FF2B5EF4-FFF2-40B4-BE49-F238E27FC236}">
-                <a16:creationId xmlns:a16="http://schemas.microsoft.com/office/drawing/2014/main" id="{C7316C6D-F8A1-4EE3-A239-F2EB9123054F}"/>
-              </a:ext>
-            </a:extLst>
-          </p:cNvPr>
-          <p:cNvSpPr/>
-          <p:nvPr/>
-        </p:nvSpPr>
-        <p:spPr>
-          <a:xfrm>
-            <a:off x="4572000" y="1416902"/>
-            <a:ext cx="2275200" cy="723000"/>
-          </a:xfrm>
-          <a:prstGeom prst="roundRect">
-            <a:avLst/>
-          </a:prstGeom>
-          <a:solidFill>
-            <a:schemeClr val="bg2">
-              <a:lumMod val="50000"/>
-            </a:schemeClr>
-          </a:solidFill>
-          <a:ln>
-            <a:solidFill>
-              <a:schemeClr val="bg2">
-                <a:lumMod val="50000"/>
-              </a:schemeClr>
-            </a:solidFill>
-          </a:ln>
-        </p:spPr>
-        <p:style>
-          <a:lnRef idx="2">
-            <a:schemeClr val="accent1">
-              <a:shade val="50000"/>
-            </a:schemeClr>
-          </a:lnRef>
-          <a:fillRef idx="1">
-            <a:schemeClr val="accent1"/>
-          </a:fillRef>
-          <a:effectRef idx="0">
-            <a:schemeClr val="accent1"/>
-          </a:effectRef>
-          <a:fontRef idx="minor">
-            <a:schemeClr val="lt1"/>
-          </a:fontRef>
-        </p:style>
-        <p:txBody>
-          <a:bodyPr rtlCol="0" anchor="ctr"/>
-          <a:lstStyle/>
-          <a:p>
-            <a:pPr algn="ctr"/>
-            <a:endParaRPr lang="ru-RU" dirty="0"/>
-          </a:p>
-        </p:txBody>
-      </p:sp>
-      <p:sp>
-        <p:nvSpPr>
           <p:cNvPr id="229" name="Google Shape;229;p35"/>
           <p:cNvSpPr txBox="1">
             <a:spLocks noGrp="1"/>
@@ -9742,85 +9519,12 @@
           </a:bodyPr>
           <a:lstStyle/>
           <a:p>
+            <a:pPr algn="l"/>
             <a:r>
               <a:rPr lang="ru-RU" sz="2400" dirty="0"/>
-              <a:t>Реализация</a:t>
+              <a:t>Фронтенд</a:t>
             </a:r>
             <a:endParaRPr sz="2400" dirty="0"/>
-          </a:p>
-        </p:txBody>
-      </p:sp>
-      <p:sp>
-        <p:nvSpPr>
-          <p:cNvPr id="230" name="Google Shape;230;p35"/>
-          <p:cNvSpPr txBox="1">
-            <a:spLocks noGrp="1"/>
-          </p:cNvSpPr>
-          <p:nvPr>
-            <p:ph type="subTitle" idx="1"/>
-          </p:nvPr>
-        </p:nvSpPr>
-        <p:spPr>
-          <a:xfrm>
-            <a:off x="1299835" y="2571750"/>
-            <a:ext cx="2487696" cy="1139869"/>
-          </a:xfrm>
-          <a:prstGeom prst="rect">
-            <a:avLst/>
-          </a:prstGeom>
-        </p:spPr>
-        <p:txBody>
-          <a:bodyPr spcFirstLastPara="1" wrap="square" lIns="91425" tIns="91425" rIns="91425" bIns="91425" anchor="t" anchorCtr="0">
-            <a:noAutofit/>
-          </a:bodyPr>
-          <a:lstStyle/>
-          <a:p>
-            <a:pPr marL="0" lvl="0" indent="0" algn="r" rtl="0">
-              <a:spcBef>
-                <a:spcPts val="0"/>
-              </a:spcBef>
-              <a:spcAft>
-                <a:spcPts val="0"/>
-              </a:spcAft>
-              <a:buClr>
-                <a:schemeClr val="dk1"/>
-              </a:buClr>
-              <a:buSzPts val="1100"/>
-              <a:buFont typeface="Arial"/>
-              <a:buNone/>
-            </a:pPr>
-            <a:r>
-              <a:rPr lang="ru-RU" dirty="0">
-                <a:latin typeface="Arial" panose="020B0604020202020204" pitchFamily="34" charset="0"/>
-                <a:cs typeface="Arial" panose="020B0604020202020204" pitchFamily="34" charset="0"/>
-              </a:rPr>
-              <a:t>Перейдите по ссылке и узнайте о </a:t>
-            </a:r>
-            <a:r>
-              <a:rPr lang="en-US" dirty="0" err="1">
-                <a:latin typeface="Arial" panose="020B0604020202020204" pitchFamily="34" charset="0"/>
-                <a:cs typeface="Arial" panose="020B0604020202020204" pitchFamily="34" charset="0"/>
-              </a:rPr>
-              <a:t>NaRuTagAI</a:t>
-            </a:r>
-            <a:r>
-              <a:rPr lang="en-US" dirty="0">
-                <a:latin typeface="Arial" panose="020B0604020202020204" pitchFamily="34" charset="0"/>
-                <a:cs typeface="Arial" panose="020B0604020202020204" pitchFamily="34" charset="0"/>
-              </a:rPr>
-              <a:t> </a:t>
-            </a:r>
-            <a:r>
-              <a:rPr lang="ru-RU" dirty="0">
-                <a:latin typeface="Arial" panose="020B0604020202020204" pitchFamily="34" charset="0"/>
-                <a:cs typeface="Arial" panose="020B0604020202020204" pitchFamily="34" charset="0"/>
-              </a:rPr>
-              <a:t>подробнее</a:t>
-            </a:r>
-            <a:endParaRPr dirty="0">
-              <a:latin typeface="Arial" panose="020B0604020202020204" pitchFamily="34" charset="0"/>
-              <a:cs typeface="Arial" panose="020B0604020202020204" pitchFamily="34" charset="0"/>
-            </a:endParaRPr>
           </a:p>
         </p:txBody>
       </p:sp>
@@ -9838,7 +9542,7 @@
         </p:nvSpPr>
         <p:spPr>
           <a:xfrm>
-            <a:off x="1681767" y="3362399"/>
+            <a:off x="1574980" y="3015557"/>
             <a:ext cx="1723833" cy="1715343"/>
           </a:xfrm>
           <a:prstGeom prst="roundRect">
@@ -9901,7 +9605,7 @@
         </p:blipFill>
         <p:spPr>
           <a:xfrm>
-            <a:off x="1801213" y="3477600"/>
+            <a:off x="1688096" y="3124428"/>
             <a:ext cx="1497600" cy="1497600"/>
           </a:xfrm>
           <a:prstGeom prst="rect">
@@ -9911,10 +9615,10 @@
       </p:pic>
       <p:pic>
         <p:nvPicPr>
-          <p:cNvPr id="10" name="Рисунок 9">
+          <p:cNvPr id="7" name="Рисунок 6">
             <a:extLst>
               <a:ext uri="{FF2B5EF4-FFF2-40B4-BE49-F238E27FC236}">
-                <a16:creationId xmlns:a16="http://schemas.microsoft.com/office/drawing/2014/main" id="{A6E240F8-6B12-4130-9A96-FFA36630B940}"/>
+                <a16:creationId xmlns:a16="http://schemas.microsoft.com/office/drawing/2014/main" id="{59A23C19-8CAE-47C4-9F2A-A681C395E180}"/>
               </a:ext>
             </a:extLst>
           </p:cNvPr>
@@ -9931,163 +9635,14 @@
         </p:blipFill>
         <p:spPr>
           <a:xfrm>
-            <a:off x="4302262" y="2213178"/>
-            <a:ext cx="2907724" cy="2864564"/>
+            <a:off x="3667895" y="319555"/>
+            <a:ext cx="5329346" cy="4570988"/>
           </a:xfrm>
           <a:prstGeom prst="rect">
             <a:avLst/>
           </a:prstGeom>
         </p:spPr>
       </p:pic>
-      <p:pic>
-        <p:nvPicPr>
-          <p:cNvPr id="12" name="Рисунок 11">
-            <a:extLst>
-              <a:ext uri="{FF2B5EF4-FFF2-40B4-BE49-F238E27FC236}">
-                <a16:creationId xmlns:a16="http://schemas.microsoft.com/office/drawing/2014/main" id="{F5D3B5D3-80E9-49B3-A669-EBB598C013A7}"/>
-              </a:ext>
-            </a:extLst>
-          </p:cNvPr>
-          <p:cNvPicPr>
-            <a:picLocks noChangeAspect="1"/>
-          </p:cNvPicPr>
-          <p:nvPr/>
-        </p:nvPicPr>
-        <p:blipFill>
-          <a:blip r:embed="rId6"/>
-          <a:stretch>
-            <a:fillRect/>
-          </a:stretch>
-        </p:blipFill>
-        <p:spPr>
-          <a:xfrm>
-            <a:off x="7459120" y="213299"/>
-            <a:ext cx="1485982" cy="3149100"/>
-          </a:xfrm>
-          <a:prstGeom prst="rect">
-            <a:avLst/>
-          </a:prstGeom>
-        </p:spPr>
-      </p:pic>
-      <p:sp>
-        <p:nvSpPr>
-          <p:cNvPr id="16" name="TextBox 15">
-            <a:extLst>
-              <a:ext uri="{FF2B5EF4-FFF2-40B4-BE49-F238E27FC236}">
-                <a16:creationId xmlns:a16="http://schemas.microsoft.com/office/drawing/2014/main" id="{4EBC07C1-97E9-425C-B516-ADE1310918ED}"/>
-              </a:ext>
-            </a:extLst>
-          </p:cNvPr>
-          <p:cNvSpPr txBox="1"/>
-          <p:nvPr/>
-        </p:nvSpPr>
-        <p:spPr>
-          <a:xfrm>
-            <a:off x="4719662" y="1595298"/>
-            <a:ext cx="1979875" cy="338554"/>
-          </a:xfrm>
-          <a:prstGeom prst="rect">
-            <a:avLst/>
-          </a:prstGeom>
-          <a:noFill/>
-        </p:spPr>
-        <p:txBody>
-          <a:bodyPr wrap="square">
-            <a:spAutoFit/>
-          </a:bodyPr>
-          <a:lstStyle/>
-          <a:p>
-            <a:r>
-              <a:rPr lang="ru-RU" sz="1600" b="1" dirty="0">
-                <a:solidFill>
-                  <a:schemeClr val="bg1"/>
-                </a:solidFill>
-              </a:rPr>
-              <a:t>ПК-версия сайта</a:t>
-            </a:r>
-          </a:p>
-        </p:txBody>
-      </p:sp>
-      <p:sp>
-        <p:nvSpPr>
-          <p:cNvPr id="18" name="TextBox 17">
-            <a:extLst>
-              <a:ext uri="{FF2B5EF4-FFF2-40B4-BE49-F238E27FC236}">
-                <a16:creationId xmlns:a16="http://schemas.microsoft.com/office/drawing/2014/main" id="{A8E08F2D-D719-4D3D-AE2D-B63135E3697C}"/>
-              </a:ext>
-            </a:extLst>
-          </p:cNvPr>
-          <p:cNvSpPr txBox="1"/>
-          <p:nvPr/>
-        </p:nvSpPr>
-        <p:spPr>
-          <a:xfrm>
-            <a:off x="7459120" y="3477600"/>
-            <a:ext cx="1485982" cy="584775"/>
-          </a:xfrm>
-          <a:prstGeom prst="rect">
-            <a:avLst/>
-          </a:prstGeom>
-          <a:noFill/>
-        </p:spPr>
-        <p:txBody>
-          <a:bodyPr wrap="square">
-            <a:spAutoFit/>
-          </a:bodyPr>
-          <a:lstStyle/>
-          <a:p>
-            <a:r>
-              <a:rPr lang="ru-RU" sz="1600" b="1" dirty="0">
-                <a:solidFill>
-                  <a:schemeClr val="bg1"/>
-                </a:solidFill>
-              </a:rPr>
-              <a:t>Мобильное приложение</a:t>
-            </a:r>
-          </a:p>
-        </p:txBody>
-      </p:sp>
-      <p:sp>
-        <p:nvSpPr>
-          <p:cNvPr id="22" name="TextBox 21">
-            <a:extLst>
-              <a:ext uri="{FF2B5EF4-FFF2-40B4-BE49-F238E27FC236}">
-                <a16:creationId xmlns:a16="http://schemas.microsoft.com/office/drawing/2014/main" id="{7D42826C-2031-4C56-A4D2-99BFDD58CB39}"/>
-              </a:ext>
-            </a:extLst>
-          </p:cNvPr>
-          <p:cNvSpPr txBox="1"/>
-          <p:nvPr/>
-        </p:nvSpPr>
-        <p:spPr>
-          <a:xfrm>
-            <a:off x="2517138" y="927620"/>
-            <a:ext cx="2540786" cy="523220"/>
-          </a:xfrm>
-          <a:prstGeom prst="rect">
-            <a:avLst/>
-          </a:prstGeom>
-          <a:noFill/>
-        </p:spPr>
-        <p:txBody>
-          <a:bodyPr wrap="square">
-            <a:spAutoFit/>
-          </a:bodyPr>
-          <a:lstStyle/>
-          <a:p>
-            <a:r>
-              <a:rPr lang="ru-RU" dirty="0"/>
-              <a:t>Ссылка для входа на сайт:</a:t>
-            </a:r>
-          </a:p>
-          <a:p>
-            <a:r>
-              <a:rPr lang="ru-RU" dirty="0"/>
-              <a:t>http://185.187.91.9:3000/</a:t>
-            </a:r>
-          </a:p>
-        </p:txBody>
-      </p:sp>
     </p:spTree>
     <p:extLst>
       <p:ext uri="{BB962C8B-B14F-4D97-AF65-F5344CB8AC3E}">
@@ -10102,1500 +9657,6 @@
 </file>
 
 <file path=ppt/slides/slide6.xml><?xml version="1.0" encoding="utf-8"?>
-<p:sld xmlns:a="http://schemas.openxmlformats.org/drawingml/2006/main" xmlns:r="http://schemas.openxmlformats.org/officeDocument/2006/relationships" xmlns:p="http://schemas.openxmlformats.org/presentationml/2006/main">
-  <p:cSld>
-    <p:spTree>
-      <p:nvGrpSpPr>
-        <p:cNvPr id="1" name="Shape 250"/>
-        <p:cNvGrpSpPr/>
-        <p:nvPr/>
-      </p:nvGrpSpPr>
-      <p:grpSpPr>
-        <a:xfrm>
-          <a:off x="0" y="0"/>
-          <a:ext cx="0" cy="0"/>
-          <a:chOff x="0" y="0"/>
-          <a:chExt cx="0" cy="0"/>
-        </a:xfrm>
-      </p:grpSpPr>
-      <p:pic>
-        <p:nvPicPr>
-          <p:cNvPr id="3" name="Рисунок 2">
-            <a:extLst>
-              <a:ext uri="{FF2B5EF4-FFF2-40B4-BE49-F238E27FC236}">
-                <a16:creationId xmlns:a16="http://schemas.microsoft.com/office/drawing/2014/main" id="{92D24AA3-E2E2-49D3-AA18-F6EE57C25D94}"/>
-              </a:ext>
-            </a:extLst>
-          </p:cNvPr>
-          <p:cNvPicPr>
-            <a:picLocks noChangeAspect="1"/>
-          </p:cNvPicPr>
-          <p:nvPr/>
-        </p:nvPicPr>
-        <p:blipFill>
-          <a:blip r:embed="rId3"/>
-          <a:stretch>
-            <a:fillRect/>
-          </a:stretch>
-        </p:blipFill>
-        <p:spPr>
-          <a:xfrm>
-            <a:off x="2221563" y="1281600"/>
-            <a:ext cx="6497745" cy="2782803"/>
-          </a:xfrm>
-          <a:prstGeom prst="rect">
-            <a:avLst/>
-          </a:prstGeom>
-        </p:spPr>
-      </p:pic>
-      <p:sp>
-        <p:nvSpPr>
-          <p:cNvPr id="251" name="Google Shape;251;p37"/>
-          <p:cNvSpPr txBox="1">
-            <a:spLocks noGrp="1"/>
-          </p:cNvSpPr>
-          <p:nvPr>
-            <p:ph type="title"/>
-          </p:nvPr>
-        </p:nvSpPr>
-        <p:spPr>
-          <a:xfrm>
-            <a:off x="1384600" y="369567"/>
-            <a:ext cx="5611000" cy="647700"/>
-          </a:xfrm>
-          <a:prstGeom prst="rect">
-            <a:avLst/>
-          </a:prstGeom>
-        </p:spPr>
-        <p:txBody>
-          <a:bodyPr spcFirstLastPara="1" wrap="square" lIns="91425" tIns="91425" rIns="91425" bIns="91425" anchor="t" anchorCtr="0">
-            <a:noAutofit/>
-          </a:bodyPr>
-          <a:lstStyle/>
-          <a:p>
-            <a:pPr marL="0" lvl="0" indent="0" algn="l" rtl="0">
-              <a:spcBef>
-                <a:spcPts val="0"/>
-              </a:spcBef>
-              <a:spcAft>
-                <a:spcPts val="0"/>
-              </a:spcAft>
-              <a:buNone/>
-            </a:pPr>
-            <a:r>
-              <a:rPr lang="ru-RU" dirty="0"/>
-              <a:t>Сравнение с конкурентами</a:t>
-            </a:r>
-            <a:endParaRPr dirty="0"/>
-          </a:p>
-        </p:txBody>
-      </p:sp>
-      <p:graphicFrame>
-        <p:nvGraphicFramePr>
-          <p:cNvPr id="252" name="Google Shape;252;p37"/>
-          <p:cNvGraphicFramePr/>
-          <p:nvPr>
-            <p:extLst>
-              <p:ext uri="{D42A27DB-BD31-4B8C-83A1-F6EECF244321}">
-                <p14:modId xmlns:p14="http://schemas.microsoft.com/office/powerpoint/2010/main" val="3110254730"/>
-              </p:ext>
-            </p:extLst>
-          </p:nvPr>
-        </p:nvGraphicFramePr>
-        <p:xfrm>
-          <a:off x="90191" y="2360151"/>
-          <a:ext cx="3797809" cy="2451583"/>
-        </p:xfrm>
-        <a:graphic>
-          <a:graphicData uri="http://schemas.openxmlformats.org/drawingml/2006/table">
-            <a:tbl>
-              <a:tblPr>
-                <a:noFill/>
-                <a:tableStyleId>{AA40D108-D6AE-43E7-AB06-EF01642F37EF}</a:tableStyleId>
-              </a:tblPr>
-              <a:tblGrid>
-                <a:gridCol w="1470119">
-                  <a:extLst>
-                    <a:ext uri="{9D8B030D-6E8A-4147-A177-3AD203B41FA5}">
-                      <a16:colId xmlns:a16="http://schemas.microsoft.com/office/drawing/2014/main" val="20000"/>
-                    </a:ext>
-                  </a:extLst>
-                </a:gridCol>
-                <a:gridCol w="1262845">
-                  <a:extLst>
-                    <a:ext uri="{9D8B030D-6E8A-4147-A177-3AD203B41FA5}">
-                      <a16:colId xmlns:a16="http://schemas.microsoft.com/office/drawing/2014/main" val="20001"/>
-                    </a:ext>
-                  </a:extLst>
-                </a:gridCol>
-                <a:gridCol w="1064845">
-                  <a:extLst>
-                    <a:ext uri="{9D8B030D-6E8A-4147-A177-3AD203B41FA5}">
-                      <a16:colId xmlns:a16="http://schemas.microsoft.com/office/drawing/2014/main" val="20002"/>
-                    </a:ext>
-                  </a:extLst>
-                </a:gridCol>
-              </a:tblGrid>
-              <a:tr h="423423">
-                <a:tc>
-                  <a:txBody>
-                    <a:bodyPr/>
-                    <a:lstStyle/>
-                    <a:p>
-                      <a:pPr marL="0" lvl="0" indent="0" algn="ctr" rtl="0">
-                        <a:spcBef>
-                          <a:spcPts val="0"/>
-                        </a:spcBef>
-                        <a:spcAft>
-                          <a:spcPts val="0"/>
-                        </a:spcAft>
-                        <a:buNone/>
-                      </a:pPr>
-                      <a:endParaRPr sz="1800" b="1" dirty="0">
-                        <a:solidFill>
-                          <a:schemeClr val="lt1"/>
-                        </a:solidFill>
-                        <a:latin typeface="Montserrat"/>
-                        <a:ea typeface="Montserrat"/>
-                        <a:cs typeface="Montserrat"/>
-                        <a:sym typeface="Montserrat"/>
-                      </a:endParaRPr>
-                    </a:p>
-                  </a:txBody>
-                  <a:tcPr marL="91425" marR="91425" marT="91425" marB="91425" anchor="ctr">
-                    <a:lnL w="12700" cap="flat" cmpd="sng" algn="ctr">
-                      <a:solidFill>
-                        <a:schemeClr val="tx1"/>
-                      </a:solidFill>
-                      <a:prstDash val="solid"/>
-                      <a:round/>
-                      <a:headEnd type="none" w="med" len="med"/>
-                      <a:tailEnd type="none" w="med" len="med"/>
-                    </a:lnL>
-                    <a:lnR w="12700" cap="flat" cmpd="sng" algn="ctr">
-                      <a:solidFill>
-                        <a:schemeClr val="tx1"/>
-                      </a:solidFill>
-                      <a:prstDash val="solid"/>
-                      <a:round/>
-                      <a:headEnd type="none" w="med" len="med"/>
-                      <a:tailEnd type="none" w="med" len="med"/>
-                    </a:lnR>
-                    <a:lnT w="12700" cap="flat" cmpd="sng" algn="ctr">
-                      <a:solidFill>
-                        <a:schemeClr val="tx1"/>
-                      </a:solidFill>
-                      <a:prstDash val="solid"/>
-                      <a:round/>
-                      <a:headEnd type="none" w="med" len="med"/>
-                      <a:tailEnd type="none" w="med" len="med"/>
-                    </a:lnT>
-                    <a:lnB w="12700" cap="flat" cmpd="sng" algn="ctr">
-                      <a:solidFill>
-                        <a:schemeClr val="tx1"/>
-                      </a:solidFill>
-                      <a:prstDash val="solid"/>
-                      <a:round/>
-                      <a:headEnd type="none" w="med" len="med"/>
-                      <a:tailEnd type="none" w="med" len="med"/>
-                    </a:lnB>
-                  </a:tcPr>
-                </a:tc>
-                <a:tc>
-                  <a:txBody>
-                    <a:bodyPr/>
-                    <a:lstStyle/>
-                    <a:p>
-                      <a:pPr marL="0" lvl="0" indent="0" algn="ctr" rtl="0">
-                        <a:spcBef>
-                          <a:spcPts val="0"/>
-                        </a:spcBef>
-                        <a:spcAft>
-                          <a:spcPts val="0"/>
-                        </a:spcAft>
-                        <a:buNone/>
-                      </a:pPr>
-                      <a:r>
-                        <a:rPr lang="en" b="1" dirty="0">
-                          <a:solidFill>
-                            <a:schemeClr val="lt1"/>
-                          </a:solidFill>
-                          <a:latin typeface="Montserrat"/>
-                          <a:ea typeface="Montserrat"/>
-                          <a:cs typeface="Montserrat"/>
-                          <a:sym typeface="Montserrat"/>
-                        </a:rPr>
-                        <a:t>IoU</a:t>
-                      </a:r>
-                      <a:endParaRPr b="1" dirty="0">
-                        <a:solidFill>
-                          <a:schemeClr val="lt1"/>
-                        </a:solidFill>
-                        <a:latin typeface="Montserrat"/>
-                        <a:ea typeface="Montserrat"/>
-                        <a:cs typeface="Montserrat"/>
-                        <a:sym typeface="Montserrat"/>
-                      </a:endParaRPr>
-                    </a:p>
-                  </a:txBody>
-                  <a:tcPr marL="91425" marR="91425" marT="91425" marB="91425" anchor="ctr">
-                    <a:lnL w="12700" cap="flat" cmpd="sng" algn="ctr">
-                      <a:solidFill>
-                        <a:schemeClr val="tx1"/>
-                      </a:solidFill>
-                      <a:prstDash val="solid"/>
-                      <a:round/>
-                      <a:headEnd type="none" w="med" len="med"/>
-                      <a:tailEnd type="none" w="med" len="med"/>
-                    </a:lnL>
-                    <a:lnR w="28575" cap="flat" cmpd="sng">
-                      <a:solidFill>
-                        <a:schemeClr val="lt1">
-                          <a:alpha val="0"/>
-                        </a:schemeClr>
-                      </a:solidFill>
-                      <a:prstDash val="solid"/>
-                      <a:round/>
-                      <a:headEnd type="none" w="sm" len="sm"/>
-                      <a:tailEnd type="none" w="sm" len="sm"/>
-                    </a:lnR>
-                    <a:lnT w="28575" cap="flat" cmpd="sng">
-                      <a:solidFill>
-                        <a:schemeClr val="accent1">
-                          <a:alpha val="0"/>
-                        </a:schemeClr>
-                      </a:solidFill>
-                      <a:prstDash val="solid"/>
-                      <a:round/>
-                      <a:headEnd type="none" w="sm" len="sm"/>
-                      <a:tailEnd type="none" w="sm" len="sm"/>
-                    </a:lnT>
-                    <a:lnB w="12700" cap="flat" cmpd="sng" algn="ctr">
-                      <a:solidFill>
-                        <a:schemeClr val="tx1"/>
-                      </a:solidFill>
-                      <a:prstDash val="solid"/>
-                      <a:round/>
-                      <a:headEnd type="none" w="med" len="med"/>
-                      <a:tailEnd type="none" w="med" len="med"/>
-                    </a:lnB>
-                    <a:solidFill>
-                      <a:schemeClr val="accent1"/>
-                    </a:solidFill>
-                  </a:tcPr>
-                </a:tc>
-                <a:tc>
-                  <a:txBody>
-                    <a:bodyPr/>
-                    <a:lstStyle/>
-                    <a:p>
-                      <a:pPr marL="0" lvl="0" indent="0" algn="ctr" rtl="0">
-                        <a:spcBef>
-                          <a:spcPts val="0"/>
-                        </a:spcBef>
-                        <a:spcAft>
-                          <a:spcPts val="0"/>
-                        </a:spcAft>
-                        <a:buNone/>
-                      </a:pPr>
-                      <a:r>
-                        <a:rPr lang="ru-RU" b="1" dirty="0">
-                          <a:solidFill>
-                            <a:schemeClr val="lt1"/>
-                          </a:solidFill>
-                          <a:latin typeface="Montserrat"/>
-                          <a:ea typeface="Montserrat"/>
-                          <a:cs typeface="Montserrat"/>
-                          <a:sym typeface="Montserrat"/>
-                        </a:rPr>
-                        <a:t>Время, с</a:t>
-                      </a:r>
-                      <a:endParaRPr b="1" dirty="0">
-                        <a:solidFill>
-                          <a:schemeClr val="lt1"/>
-                        </a:solidFill>
-                        <a:latin typeface="Montserrat"/>
-                        <a:ea typeface="Montserrat"/>
-                        <a:cs typeface="Montserrat"/>
-                        <a:sym typeface="Montserrat"/>
-                      </a:endParaRPr>
-                    </a:p>
-                  </a:txBody>
-                  <a:tcPr marL="91425" marR="91425" marT="91425" marB="91425" anchor="ctr">
-                    <a:lnL w="28575" cap="flat" cmpd="sng">
-                      <a:solidFill>
-                        <a:schemeClr val="lt1">
-                          <a:alpha val="0"/>
-                        </a:schemeClr>
-                      </a:solidFill>
-                      <a:prstDash val="solid"/>
-                      <a:round/>
-                      <a:headEnd type="none" w="sm" len="sm"/>
-                      <a:tailEnd type="none" w="sm" len="sm"/>
-                    </a:lnL>
-                    <a:lnR w="28575" cap="flat" cmpd="sng">
-                      <a:solidFill>
-                        <a:schemeClr val="lt1">
-                          <a:alpha val="0"/>
-                        </a:schemeClr>
-                      </a:solidFill>
-                      <a:prstDash val="solid"/>
-                      <a:round/>
-                      <a:headEnd type="none" w="sm" len="sm"/>
-                      <a:tailEnd type="none" w="sm" len="sm"/>
-                    </a:lnR>
-                    <a:lnT w="28575" cap="flat" cmpd="sng">
-                      <a:solidFill>
-                        <a:schemeClr val="accent1">
-                          <a:alpha val="0"/>
-                        </a:schemeClr>
-                      </a:solidFill>
-                      <a:prstDash val="solid"/>
-                      <a:round/>
-                      <a:headEnd type="none" w="sm" len="sm"/>
-                      <a:tailEnd type="none" w="sm" len="sm"/>
-                    </a:lnT>
-                    <a:lnB w="12700" cap="flat" cmpd="sng" algn="ctr">
-                      <a:solidFill>
-                        <a:schemeClr val="tx1"/>
-                      </a:solidFill>
-                      <a:prstDash val="solid"/>
-                      <a:round/>
-                      <a:headEnd type="none" w="med" len="med"/>
-                      <a:tailEnd type="none" w="med" len="med"/>
-                    </a:lnB>
-                    <a:solidFill>
-                      <a:schemeClr val="accent1"/>
-                    </a:solidFill>
-                  </a:tcPr>
-                </a:tc>
-                <a:extLst>
-                  <a:ext uri="{0D108BD9-81ED-4DB2-BD59-A6C34878D82A}">
-                    <a16:rowId xmlns:a16="http://schemas.microsoft.com/office/drawing/2014/main" val="10000"/>
-                  </a:ext>
-                </a:extLst>
-              </a:tr>
-              <a:tr h="377308">
-                <a:tc>
-                  <a:txBody>
-                    <a:bodyPr/>
-                    <a:lstStyle/>
-                    <a:p>
-                      <a:pPr marL="0" lvl="0" indent="0" algn="ctr" rtl="0">
-                        <a:spcBef>
-                          <a:spcPts val="0"/>
-                        </a:spcBef>
-                        <a:spcAft>
-                          <a:spcPts val="0"/>
-                        </a:spcAft>
-                        <a:buNone/>
-                      </a:pPr>
-                      <a:r>
-                        <a:rPr lang="en" b="1" dirty="0">
-                          <a:solidFill>
-                            <a:schemeClr val="bg1"/>
-                          </a:solidFill>
-                          <a:latin typeface="Montserrat"/>
-                          <a:ea typeface="Montserrat"/>
-                          <a:cs typeface="Montserrat"/>
-                          <a:sym typeface="Montserrat"/>
-                        </a:rPr>
-                        <a:t>vidIQ</a:t>
-                      </a:r>
-                      <a:endParaRPr b="1" dirty="0">
-                        <a:solidFill>
-                          <a:schemeClr val="bg1"/>
-                        </a:solidFill>
-                        <a:latin typeface="Montserrat"/>
-                        <a:ea typeface="Montserrat"/>
-                        <a:cs typeface="Montserrat"/>
-                        <a:sym typeface="Montserrat"/>
-                      </a:endParaRPr>
-                    </a:p>
-                  </a:txBody>
-                  <a:tcPr marL="91425" marR="91425" marT="91425" marB="91425" anchor="ctr">
-                    <a:lnL w="28575" cap="flat" cmpd="sng">
-                      <a:solidFill>
-                        <a:schemeClr val="dk2">
-                          <a:alpha val="0"/>
-                        </a:schemeClr>
-                      </a:solidFill>
-                      <a:prstDash val="solid"/>
-                      <a:round/>
-                      <a:headEnd type="none" w="sm" len="sm"/>
-                      <a:tailEnd type="none" w="sm" len="sm"/>
-                    </a:lnL>
-                    <a:lnR w="12700" cap="flat" cmpd="sng" algn="ctr">
-                      <a:solidFill>
-                        <a:schemeClr val="tx1"/>
-                      </a:solidFill>
-                      <a:prstDash val="solid"/>
-                      <a:round/>
-                      <a:headEnd type="none" w="med" len="med"/>
-                      <a:tailEnd type="none" w="med" len="med"/>
-                    </a:lnR>
-                    <a:lnT w="12700" cap="flat" cmpd="sng" algn="ctr">
-                      <a:solidFill>
-                        <a:schemeClr val="tx1"/>
-                      </a:solidFill>
-                      <a:prstDash val="solid"/>
-                      <a:round/>
-                      <a:headEnd type="none" w="med" len="med"/>
-                      <a:tailEnd type="none" w="med" len="med"/>
-                    </a:lnT>
-                    <a:lnB w="28575" cap="flat" cmpd="sng">
-                      <a:solidFill>
-                        <a:schemeClr val="dk2">
-                          <a:alpha val="0"/>
-                        </a:schemeClr>
-                      </a:solidFill>
-                      <a:prstDash val="solid"/>
-                      <a:round/>
-                      <a:headEnd type="none" w="sm" len="sm"/>
-                      <a:tailEnd type="none" w="sm" len="sm"/>
-                    </a:lnB>
-                    <a:solidFill>
-                      <a:schemeClr val="bg2">
-                        <a:lumMod val="50000"/>
-                      </a:schemeClr>
-                    </a:solidFill>
-                  </a:tcPr>
-                </a:tc>
-                <a:tc>
-                  <a:txBody>
-                    <a:bodyPr/>
-                    <a:lstStyle/>
-                    <a:p>
-                      <a:pPr marL="0" lvl="0" indent="0" algn="ctr" rtl="0">
-                        <a:spcBef>
-                          <a:spcPts val="0"/>
-                        </a:spcBef>
-                        <a:spcAft>
-                          <a:spcPts val="0"/>
-                        </a:spcAft>
-                        <a:buNone/>
-                      </a:pPr>
-                      <a:r>
-                        <a:rPr lang="en-US" dirty="0"/>
-                        <a:t>0.68</a:t>
-                      </a:r>
-                      <a:endParaRPr dirty="0"/>
-                    </a:p>
-                  </a:txBody>
-                  <a:tcPr marL="91425" marR="91425" marT="91425" marB="91425">
-                    <a:lnL w="12700" cap="flat" cmpd="sng" algn="ctr">
-                      <a:solidFill>
-                        <a:schemeClr val="tx1"/>
-                      </a:solidFill>
-                      <a:prstDash val="solid"/>
-                      <a:round/>
-                      <a:headEnd type="none" w="med" len="med"/>
-                      <a:tailEnd type="none" w="med" len="med"/>
-                    </a:lnL>
-                    <a:lnR w="12700" cap="flat" cmpd="sng" algn="ctr">
-                      <a:solidFill>
-                        <a:schemeClr val="tx1"/>
-                      </a:solidFill>
-                      <a:prstDash val="solid"/>
-                      <a:round/>
-                      <a:headEnd type="none" w="med" len="med"/>
-                      <a:tailEnd type="none" w="med" len="med"/>
-                    </a:lnR>
-                    <a:lnT w="12700" cap="flat" cmpd="sng" algn="ctr">
-                      <a:solidFill>
-                        <a:schemeClr val="tx1"/>
-                      </a:solidFill>
-                      <a:prstDash val="solid"/>
-                      <a:round/>
-                      <a:headEnd type="none" w="med" len="med"/>
-                      <a:tailEnd type="none" w="med" len="med"/>
-                    </a:lnT>
-                    <a:lnB w="12700" cap="flat" cmpd="sng" algn="ctr">
-                      <a:solidFill>
-                        <a:schemeClr val="tx1"/>
-                      </a:solidFill>
-                      <a:prstDash val="solid"/>
-                      <a:round/>
-                      <a:headEnd type="none" w="med" len="med"/>
-                      <a:tailEnd type="none" w="med" len="med"/>
-                    </a:lnB>
-                  </a:tcPr>
-                </a:tc>
-                <a:tc>
-                  <a:txBody>
-                    <a:bodyPr/>
-                    <a:lstStyle/>
-                    <a:p>
-                      <a:pPr marL="0" lvl="0" indent="0" algn="ctr" rtl="0">
-                        <a:spcBef>
-                          <a:spcPts val="0"/>
-                        </a:spcBef>
-                        <a:spcAft>
-                          <a:spcPts val="0"/>
-                        </a:spcAft>
-                        <a:buNone/>
-                      </a:pPr>
-                      <a:r>
-                        <a:rPr lang="en-US" dirty="0"/>
-                        <a:t>48</a:t>
-                      </a:r>
-                      <a:endParaRPr dirty="0"/>
-                    </a:p>
-                  </a:txBody>
-                  <a:tcPr marL="91425" marR="91425" marT="91425" marB="91425">
-                    <a:lnL w="12700" cap="flat" cmpd="sng" algn="ctr">
-                      <a:solidFill>
-                        <a:schemeClr val="tx1"/>
-                      </a:solidFill>
-                      <a:prstDash val="solid"/>
-                      <a:round/>
-                      <a:headEnd type="none" w="med" len="med"/>
-                      <a:tailEnd type="none" w="med" len="med"/>
-                    </a:lnL>
-                    <a:lnR w="12700" cap="flat" cmpd="sng" algn="ctr">
-                      <a:solidFill>
-                        <a:schemeClr val="tx1"/>
-                      </a:solidFill>
-                      <a:prstDash val="solid"/>
-                      <a:round/>
-                      <a:headEnd type="none" w="med" len="med"/>
-                      <a:tailEnd type="none" w="med" len="med"/>
-                    </a:lnR>
-                    <a:lnT w="12700" cap="flat" cmpd="sng" algn="ctr">
-                      <a:solidFill>
-                        <a:schemeClr val="tx1"/>
-                      </a:solidFill>
-                      <a:prstDash val="solid"/>
-                      <a:round/>
-                      <a:headEnd type="none" w="med" len="med"/>
-                      <a:tailEnd type="none" w="med" len="med"/>
-                    </a:lnT>
-                    <a:lnB w="12700" cap="flat" cmpd="sng" algn="ctr">
-                      <a:solidFill>
-                        <a:schemeClr val="tx1"/>
-                      </a:solidFill>
-                      <a:prstDash val="solid"/>
-                      <a:round/>
-                      <a:headEnd type="none" w="med" len="med"/>
-                      <a:tailEnd type="none" w="med" len="med"/>
-                    </a:lnB>
-                  </a:tcPr>
-                </a:tc>
-                <a:extLst>
-                  <a:ext uri="{0D108BD9-81ED-4DB2-BD59-A6C34878D82A}">
-                    <a16:rowId xmlns:a16="http://schemas.microsoft.com/office/drawing/2014/main" val="10001"/>
-                  </a:ext>
-                </a:extLst>
-              </a:tr>
-              <a:tr h="409573">
-                <a:tc>
-                  <a:txBody>
-                    <a:bodyPr/>
-                    <a:lstStyle/>
-                    <a:p>
-                      <a:pPr marL="0" lvl="0" indent="0" algn="ctr" rtl="0">
-                        <a:spcBef>
-                          <a:spcPts val="0"/>
-                        </a:spcBef>
-                        <a:spcAft>
-                          <a:spcPts val="0"/>
-                        </a:spcAft>
-                        <a:buNone/>
-                      </a:pPr>
-                      <a:r>
-                        <a:rPr lang="en" b="1" dirty="0">
-                          <a:solidFill>
-                            <a:schemeClr val="bg1"/>
-                          </a:solidFill>
-                          <a:latin typeface="Montserrat"/>
-                          <a:ea typeface="Montserrat"/>
-                          <a:cs typeface="Montserrat"/>
-                          <a:sym typeface="Montserrat"/>
-                        </a:rPr>
-                        <a:t>Keyword Tool</a:t>
-                      </a:r>
-                      <a:endParaRPr b="1" dirty="0">
-                        <a:solidFill>
-                          <a:schemeClr val="bg1"/>
-                        </a:solidFill>
-                        <a:latin typeface="Montserrat"/>
-                        <a:ea typeface="Montserrat"/>
-                        <a:cs typeface="Montserrat"/>
-                        <a:sym typeface="Montserrat"/>
-                      </a:endParaRPr>
-                    </a:p>
-                  </a:txBody>
-                  <a:tcPr marL="91425" marR="91425" marT="91425" marB="91425" anchor="ctr">
-                    <a:lnL w="28575" cap="flat" cmpd="sng">
-                      <a:solidFill>
-                        <a:schemeClr val="dk2">
-                          <a:alpha val="0"/>
-                        </a:schemeClr>
-                      </a:solidFill>
-                      <a:prstDash val="solid"/>
-                      <a:round/>
-                      <a:headEnd type="none" w="sm" len="sm"/>
-                      <a:tailEnd type="none" w="sm" len="sm"/>
-                    </a:lnL>
-                    <a:lnR w="12700" cap="flat" cmpd="sng" algn="ctr">
-                      <a:solidFill>
-                        <a:schemeClr val="tx1"/>
-                      </a:solidFill>
-                      <a:prstDash val="solid"/>
-                      <a:round/>
-                      <a:headEnd type="none" w="med" len="med"/>
-                      <a:tailEnd type="none" w="med" len="med"/>
-                    </a:lnR>
-                    <a:lnT w="28575" cap="flat" cmpd="sng">
-                      <a:solidFill>
-                        <a:schemeClr val="dk2">
-                          <a:alpha val="0"/>
-                        </a:schemeClr>
-                      </a:solidFill>
-                      <a:prstDash val="solid"/>
-                      <a:round/>
-                      <a:headEnd type="none" w="sm" len="sm"/>
-                      <a:tailEnd type="none" w="sm" len="sm"/>
-                    </a:lnT>
-                    <a:lnB w="28575" cap="flat" cmpd="sng">
-                      <a:solidFill>
-                        <a:schemeClr val="dk2">
-                          <a:alpha val="0"/>
-                        </a:schemeClr>
-                      </a:solidFill>
-                      <a:prstDash val="solid"/>
-                      <a:round/>
-                      <a:headEnd type="none" w="sm" len="sm"/>
-                      <a:tailEnd type="none" w="sm" len="sm"/>
-                    </a:lnB>
-                    <a:solidFill>
-                      <a:schemeClr val="bg2">
-                        <a:lumMod val="50000"/>
-                      </a:schemeClr>
-                    </a:solidFill>
-                  </a:tcPr>
-                </a:tc>
-                <a:tc>
-                  <a:txBody>
-                    <a:bodyPr/>
-                    <a:lstStyle/>
-                    <a:p>
-                      <a:pPr marL="0" lvl="0" indent="0" algn="ctr" rtl="0">
-                        <a:spcBef>
-                          <a:spcPts val="0"/>
-                        </a:spcBef>
-                        <a:spcAft>
-                          <a:spcPts val="0"/>
-                        </a:spcAft>
-                        <a:buNone/>
-                      </a:pPr>
-                      <a:r>
-                        <a:rPr lang="en-US" dirty="0"/>
-                        <a:t>0.71</a:t>
-                      </a:r>
-                      <a:endParaRPr dirty="0"/>
-                    </a:p>
-                  </a:txBody>
-                  <a:tcPr marL="91425" marR="91425" marT="91425" marB="91425">
-                    <a:lnL w="12700" cap="flat" cmpd="sng" algn="ctr">
-                      <a:solidFill>
-                        <a:schemeClr val="tx1"/>
-                      </a:solidFill>
-                      <a:prstDash val="solid"/>
-                      <a:round/>
-                      <a:headEnd type="none" w="med" len="med"/>
-                      <a:tailEnd type="none" w="med" len="med"/>
-                    </a:lnL>
-                    <a:lnR w="12700" cap="flat" cmpd="sng" algn="ctr">
-                      <a:solidFill>
-                        <a:schemeClr val="tx1"/>
-                      </a:solidFill>
-                      <a:prstDash val="solid"/>
-                      <a:round/>
-                      <a:headEnd type="none" w="med" len="med"/>
-                      <a:tailEnd type="none" w="med" len="med"/>
-                    </a:lnR>
-                    <a:lnT w="12700" cap="flat" cmpd="sng" algn="ctr">
-                      <a:solidFill>
-                        <a:schemeClr val="tx1"/>
-                      </a:solidFill>
-                      <a:prstDash val="solid"/>
-                      <a:round/>
-                      <a:headEnd type="none" w="med" len="med"/>
-                      <a:tailEnd type="none" w="med" len="med"/>
-                    </a:lnT>
-                    <a:lnB w="12700" cap="flat" cmpd="sng" algn="ctr">
-                      <a:solidFill>
-                        <a:schemeClr val="tx1"/>
-                      </a:solidFill>
-                      <a:prstDash val="solid"/>
-                      <a:round/>
-                      <a:headEnd type="none" w="med" len="med"/>
-                      <a:tailEnd type="none" w="med" len="med"/>
-                    </a:lnB>
-                  </a:tcPr>
-                </a:tc>
-                <a:tc>
-                  <a:txBody>
-                    <a:bodyPr/>
-                    <a:lstStyle/>
-                    <a:p>
-                      <a:pPr marL="0" lvl="0" indent="0" algn="ctr" rtl="0">
-                        <a:spcBef>
-                          <a:spcPts val="0"/>
-                        </a:spcBef>
-                        <a:spcAft>
-                          <a:spcPts val="0"/>
-                        </a:spcAft>
-                        <a:buNone/>
-                      </a:pPr>
-                      <a:r>
-                        <a:rPr lang="en-US" dirty="0"/>
-                        <a:t>23</a:t>
-                      </a:r>
-                      <a:endParaRPr dirty="0"/>
-                    </a:p>
-                  </a:txBody>
-                  <a:tcPr marL="91425" marR="91425" marT="91425" marB="91425">
-                    <a:lnL w="12700" cap="flat" cmpd="sng" algn="ctr">
-                      <a:solidFill>
-                        <a:schemeClr val="tx1"/>
-                      </a:solidFill>
-                      <a:prstDash val="solid"/>
-                      <a:round/>
-                      <a:headEnd type="none" w="med" len="med"/>
-                      <a:tailEnd type="none" w="med" len="med"/>
-                    </a:lnL>
-                    <a:lnR w="12700" cap="flat" cmpd="sng" algn="ctr">
-                      <a:solidFill>
-                        <a:schemeClr val="tx1"/>
-                      </a:solidFill>
-                      <a:prstDash val="solid"/>
-                      <a:round/>
-                      <a:headEnd type="none" w="med" len="med"/>
-                      <a:tailEnd type="none" w="med" len="med"/>
-                    </a:lnR>
-                    <a:lnT w="12700" cap="flat" cmpd="sng" algn="ctr">
-                      <a:solidFill>
-                        <a:schemeClr val="tx1"/>
-                      </a:solidFill>
-                      <a:prstDash val="solid"/>
-                      <a:round/>
-                      <a:headEnd type="none" w="med" len="med"/>
-                      <a:tailEnd type="none" w="med" len="med"/>
-                    </a:lnT>
-                    <a:lnB w="12700" cap="flat" cmpd="sng" algn="ctr">
-                      <a:solidFill>
-                        <a:schemeClr val="tx1"/>
-                      </a:solidFill>
-                      <a:prstDash val="solid"/>
-                      <a:round/>
-                      <a:headEnd type="none" w="med" len="med"/>
-                      <a:tailEnd type="none" w="med" len="med"/>
-                    </a:lnB>
-                  </a:tcPr>
-                </a:tc>
-                <a:extLst>
-                  <a:ext uri="{0D108BD9-81ED-4DB2-BD59-A6C34878D82A}">
-                    <a16:rowId xmlns:a16="http://schemas.microsoft.com/office/drawing/2014/main" val="10002"/>
-                  </a:ext>
-                </a:extLst>
-              </a:tr>
-              <a:tr h="377308">
-                <a:tc>
-                  <a:txBody>
-                    <a:bodyPr/>
-                    <a:lstStyle/>
-                    <a:p>
-                      <a:pPr marL="0" lvl="0" indent="0" algn="ctr" rtl="0">
-                        <a:spcBef>
-                          <a:spcPts val="0"/>
-                        </a:spcBef>
-                        <a:spcAft>
-                          <a:spcPts val="0"/>
-                        </a:spcAft>
-                        <a:buNone/>
-                      </a:pPr>
-                      <a:r>
-                        <a:rPr lang="en" b="1" dirty="0">
-                          <a:solidFill>
-                            <a:schemeClr val="bg1"/>
-                          </a:solidFill>
-                          <a:latin typeface="Montserrat"/>
-                          <a:ea typeface="Montserrat"/>
-                          <a:cs typeface="Montserrat"/>
-                          <a:sym typeface="Montserrat"/>
-                        </a:rPr>
-                        <a:t>Rapidtags</a:t>
-                      </a:r>
-                      <a:endParaRPr b="1" dirty="0">
-                        <a:solidFill>
-                          <a:schemeClr val="bg1"/>
-                        </a:solidFill>
-                        <a:latin typeface="Montserrat"/>
-                        <a:ea typeface="Montserrat"/>
-                        <a:cs typeface="Montserrat"/>
-                        <a:sym typeface="Montserrat"/>
-                      </a:endParaRPr>
-                    </a:p>
-                  </a:txBody>
-                  <a:tcPr marL="91425" marR="91425" marT="91425" marB="91425" anchor="ctr">
-                    <a:lnL w="28575" cap="flat" cmpd="sng">
-                      <a:solidFill>
-                        <a:schemeClr val="dk2">
-                          <a:alpha val="0"/>
-                        </a:schemeClr>
-                      </a:solidFill>
-                      <a:prstDash val="solid"/>
-                      <a:round/>
-                      <a:headEnd type="none" w="sm" len="sm"/>
-                      <a:tailEnd type="none" w="sm" len="sm"/>
-                    </a:lnL>
-                    <a:lnR w="12700" cap="flat" cmpd="sng" algn="ctr">
-                      <a:solidFill>
-                        <a:schemeClr val="tx1"/>
-                      </a:solidFill>
-                      <a:prstDash val="solid"/>
-                      <a:round/>
-                      <a:headEnd type="none" w="med" len="med"/>
-                      <a:tailEnd type="none" w="med" len="med"/>
-                    </a:lnR>
-                    <a:lnT w="28575" cap="flat" cmpd="sng">
-                      <a:solidFill>
-                        <a:schemeClr val="dk2">
-                          <a:alpha val="0"/>
-                        </a:schemeClr>
-                      </a:solidFill>
-                      <a:prstDash val="solid"/>
-                      <a:round/>
-                      <a:headEnd type="none" w="sm" len="sm"/>
-                      <a:tailEnd type="none" w="sm" len="sm"/>
-                    </a:lnT>
-                    <a:lnB w="28575" cap="flat" cmpd="sng">
-                      <a:solidFill>
-                        <a:schemeClr val="dk2">
-                          <a:alpha val="0"/>
-                        </a:schemeClr>
-                      </a:solidFill>
-                      <a:prstDash val="solid"/>
-                      <a:round/>
-                      <a:headEnd type="none" w="sm" len="sm"/>
-                      <a:tailEnd type="none" w="sm" len="sm"/>
-                    </a:lnB>
-                    <a:solidFill>
-                      <a:schemeClr val="bg2">
-                        <a:lumMod val="50000"/>
-                      </a:schemeClr>
-                    </a:solidFill>
-                  </a:tcPr>
-                </a:tc>
-                <a:tc>
-                  <a:txBody>
-                    <a:bodyPr/>
-                    <a:lstStyle/>
-                    <a:p>
-                      <a:pPr marL="0" lvl="0" indent="0" algn="ctr" rtl="0">
-                        <a:spcBef>
-                          <a:spcPts val="0"/>
-                        </a:spcBef>
-                        <a:spcAft>
-                          <a:spcPts val="0"/>
-                        </a:spcAft>
-                        <a:buNone/>
-                      </a:pPr>
-                      <a:r>
-                        <a:rPr lang="en-US" dirty="0"/>
-                        <a:t>0.65</a:t>
-                      </a:r>
-                      <a:endParaRPr dirty="0"/>
-                    </a:p>
-                  </a:txBody>
-                  <a:tcPr marL="91425" marR="91425" marT="91425" marB="91425">
-                    <a:lnL w="12700" cap="flat" cmpd="sng" algn="ctr">
-                      <a:solidFill>
-                        <a:schemeClr val="tx1"/>
-                      </a:solidFill>
-                      <a:prstDash val="solid"/>
-                      <a:round/>
-                      <a:headEnd type="none" w="med" len="med"/>
-                      <a:tailEnd type="none" w="med" len="med"/>
-                    </a:lnL>
-                    <a:lnR w="12700" cap="flat" cmpd="sng" algn="ctr">
-                      <a:solidFill>
-                        <a:schemeClr val="tx1"/>
-                      </a:solidFill>
-                      <a:prstDash val="solid"/>
-                      <a:round/>
-                      <a:headEnd type="none" w="med" len="med"/>
-                      <a:tailEnd type="none" w="med" len="med"/>
-                    </a:lnR>
-                    <a:lnT w="12700" cap="flat" cmpd="sng" algn="ctr">
-                      <a:solidFill>
-                        <a:schemeClr val="tx1"/>
-                      </a:solidFill>
-                      <a:prstDash val="solid"/>
-                      <a:round/>
-                      <a:headEnd type="none" w="med" len="med"/>
-                      <a:tailEnd type="none" w="med" len="med"/>
-                    </a:lnT>
-                    <a:lnB w="12700" cap="flat" cmpd="sng" algn="ctr">
-                      <a:solidFill>
-                        <a:schemeClr val="tx1"/>
-                      </a:solidFill>
-                      <a:prstDash val="solid"/>
-                      <a:round/>
-                      <a:headEnd type="none" w="med" len="med"/>
-                      <a:tailEnd type="none" w="med" len="med"/>
-                    </a:lnB>
-                  </a:tcPr>
-                </a:tc>
-                <a:tc>
-                  <a:txBody>
-                    <a:bodyPr/>
-                    <a:lstStyle/>
-                    <a:p>
-                      <a:pPr marL="0" lvl="0" indent="0" algn="ctr" rtl="0">
-                        <a:spcBef>
-                          <a:spcPts val="0"/>
-                        </a:spcBef>
-                        <a:spcAft>
-                          <a:spcPts val="0"/>
-                        </a:spcAft>
-                        <a:buNone/>
-                      </a:pPr>
-                      <a:r>
-                        <a:rPr lang="en-US" dirty="0"/>
-                        <a:t>58</a:t>
-                      </a:r>
-                      <a:endParaRPr dirty="0"/>
-                    </a:p>
-                  </a:txBody>
-                  <a:tcPr marL="91425" marR="91425" marT="91425" marB="91425">
-                    <a:lnL w="12700" cap="flat" cmpd="sng" algn="ctr">
-                      <a:solidFill>
-                        <a:schemeClr val="tx1"/>
-                      </a:solidFill>
-                      <a:prstDash val="solid"/>
-                      <a:round/>
-                      <a:headEnd type="none" w="med" len="med"/>
-                      <a:tailEnd type="none" w="med" len="med"/>
-                    </a:lnL>
-                    <a:lnR w="12700" cap="flat" cmpd="sng" algn="ctr">
-                      <a:solidFill>
-                        <a:schemeClr val="tx1"/>
-                      </a:solidFill>
-                      <a:prstDash val="solid"/>
-                      <a:round/>
-                      <a:headEnd type="none" w="med" len="med"/>
-                      <a:tailEnd type="none" w="med" len="med"/>
-                    </a:lnR>
-                    <a:lnT w="12700" cap="flat" cmpd="sng" algn="ctr">
-                      <a:solidFill>
-                        <a:schemeClr val="tx1"/>
-                      </a:solidFill>
-                      <a:prstDash val="solid"/>
-                      <a:round/>
-                      <a:headEnd type="none" w="med" len="med"/>
-                      <a:tailEnd type="none" w="med" len="med"/>
-                    </a:lnT>
-                    <a:lnB w="12700" cap="flat" cmpd="sng" algn="ctr">
-                      <a:solidFill>
-                        <a:schemeClr val="tx1"/>
-                      </a:solidFill>
-                      <a:prstDash val="solid"/>
-                      <a:round/>
-                      <a:headEnd type="none" w="med" len="med"/>
-                      <a:tailEnd type="none" w="med" len="med"/>
-                    </a:lnB>
-                  </a:tcPr>
-                </a:tc>
-                <a:extLst>
-                  <a:ext uri="{0D108BD9-81ED-4DB2-BD59-A6C34878D82A}">
-                    <a16:rowId xmlns:a16="http://schemas.microsoft.com/office/drawing/2014/main" val="10003"/>
-                  </a:ext>
-                </a:extLst>
-              </a:tr>
-              <a:tr h="366963">
-                <a:tc>
-                  <a:txBody>
-                    <a:bodyPr/>
-                    <a:lstStyle/>
-                    <a:p>
-                      <a:pPr marL="0" marR="0" lvl="0" indent="0" algn="ctr" defTabSz="914400" rtl="0" eaLnBrk="1" fontAlgn="auto" latinLnBrk="0" hangingPunct="1">
-                        <a:lnSpc>
-                          <a:spcPct val="100000"/>
-                        </a:lnSpc>
-                        <a:spcBef>
-                          <a:spcPts val="0"/>
-                        </a:spcBef>
-                        <a:spcAft>
-                          <a:spcPts val="0"/>
-                        </a:spcAft>
-                        <a:buClr>
-                          <a:srgbClr val="000000"/>
-                        </a:buClr>
-                        <a:buSzTx/>
-                        <a:buFont typeface="Arial"/>
-                        <a:buNone/>
-                        <a:tabLst/>
-                        <a:defRPr/>
-                      </a:pPr>
-                      <a:r>
-                        <a:rPr lang="en" b="1" dirty="0">
-                          <a:solidFill>
-                            <a:schemeClr val="bg1"/>
-                          </a:solidFill>
-                          <a:latin typeface="Montserrat"/>
-                          <a:ea typeface="Montserrat"/>
-                          <a:cs typeface="Montserrat"/>
-                          <a:sym typeface="Montserrat"/>
-                        </a:rPr>
-                        <a:t>Kparser</a:t>
-                      </a:r>
-                      <a:endParaRPr b="1" dirty="0">
-                        <a:solidFill>
-                          <a:schemeClr val="bg1"/>
-                        </a:solidFill>
-                        <a:latin typeface="Montserrat"/>
-                        <a:ea typeface="Montserrat"/>
-                        <a:cs typeface="Montserrat"/>
-                        <a:sym typeface="Montserrat"/>
-                      </a:endParaRPr>
-                    </a:p>
-                  </a:txBody>
-                  <a:tcPr marL="91425" marR="91425" marT="91425" marB="91425" anchor="ctr">
-                    <a:lnL w="28575" cap="flat" cmpd="sng">
-                      <a:solidFill>
-                        <a:schemeClr val="dk2">
-                          <a:alpha val="0"/>
-                        </a:schemeClr>
-                      </a:solidFill>
-                      <a:prstDash val="solid"/>
-                      <a:round/>
-                      <a:headEnd type="none" w="sm" len="sm"/>
-                      <a:tailEnd type="none" w="sm" len="sm"/>
-                    </a:lnL>
-                    <a:lnR w="12700" cap="flat" cmpd="sng" algn="ctr">
-                      <a:solidFill>
-                        <a:schemeClr val="tx1"/>
-                      </a:solidFill>
-                      <a:prstDash val="solid"/>
-                      <a:round/>
-                      <a:headEnd type="none" w="med" len="med"/>
-                      <a:tailEnd type="none" w="med" len="med"/>
-                    </a:lnR>
-                    <a:lnT w="28575" cap="flat" cmpd="sng">
-                      <a:solidFill>
-                        <a:schemeClr val="dk2">
-                          <a:alpha val="0"/>
-                        </a:schemeClr>
-                      </a:solidFill>
-                      <a:prstDash val="solid"/>
-                      <a:round/>
-                      <a:headEnd type="none" w="sm" len="sm"/>
-                      <a:tailEnd type="none" w="sm" len="sm"/>
-                    </a:lnT>
-                    <a:lnB w="28575" cap="flat" cmpd="sng">
-                      <a:solidFill>
-                        <a:schemeClr val="dk2">
-                          <a:alpha val="0"/>
-                        </a:schemeClr>
-                      </a:solidFill>
-                      <a:prstDash val="solid"/>
-                      <a:round/>
-                      <a:headEnd type="none" w="sm" len="sm"/>
-                      <a:tailEnd type="none" w="sm" len="sm"/>
-                    </a:lnB>
-                    <a:solidFill>
-                      <a:schemeClr val="bg2">
-                        <a:lumMod val="50000"/>
-                      </a:schemeClr>
-                    </a:solidFill>
-                  </a:tcPr>
-                </a:tc>
-                <a:tc>
-                  <a:txBody>
-                    <a:bodyPr/>
-                    <a:lstStyle/>
-                    <a:p>
-                      <a:pPr marL="0" lvl="0" indent="0" algn="ctr" rtl="0">
-                        <a:spcBef>
-                          <a:spcPts val="0"/>
-                        </a:spcBef>
-                        <a:spcAft>
-                          <a:spcPts val="0"/>
-                        </a:spcAft>
-                        <a:buNone/>
-                      </a:pPr>
-                      <a:r>
-                        <a:rPr lang="en-US" dirty="0"/>
-                        <a:t>0.64</a:t>
-                      </a:r>
-                      <a:endParaRPr dirty="0"/>
-                    </a:p>
-                  </a:txBody>
-                  <a:tcPr marL="91425" marR="91425" marT="91425" marB="91425">
-                    <a:lnL w="12700" cap="flat" cmpd="sng" algn="ctr">
-                      <a:solidFill>
-                        <a:schemeClr val="tx1"/>
-                      </a:solidFill>
-                      <a:prstDash val="solid"/>
-                      <a:round/>
-                      <a:headEnd type="none" w="med" len="med"/>
-                      <a:tailEnd type="none" w="med" len="med"/>
-                    </a:lnL>
-                    <a:lnR w="12700" cap="flat" cmpd="sng" algn="ctr">
-                      <a:solidFill>
-                        <a:schemeClr val="tx1"/>
-                      </a:solidFill>
-                      <a:prstDash val="solid"/>
-                      <a:round/>
-                      <a:headEnd type="none" w="med" len="med"/>
-                      <a:tailEnd type="none" w="med" len="med"/>
-                    </a:lnR>
-                    <a:lnT w="12700" cap="flat" cmpd="sng" algn="ctr">
-                      <a:solidFill>
-                        <a:schemeClr val="tx1"/>
-                      </a:solidFill>
-                      <a:prstDash val="solid"/>
-                      <a:round/>
-                      <a:headEnd type="none" w="med" len="med"/>
-                      <a:tailEnd type="none" w="med" len="med"/>
-                    </a:lnT>
-                    <a:lnB w="12700" cap="flat" cmpd="sng" algn="ctr">
-                      <a:solidFill>
-                        <a:schemeClr val="tx1"/>
-                      </a:solidFill>
-                      <a:prstDash val="solid"/>
-                      <a:round/>
-                      <a:headEnd type="none" w="med" len="med"/>
-                      <a:tailEnd type="none" w="med" len="med"/>
-                    </a:lnB>
-                  </a:tcPr>
-                </a:tc>
-                <a:tc>
-                  <a:txBody>
-                    <a:bodyPr/>
-                    <a:lstStyle/>
-                    <a:p>
-                      <a:pPr marL="0" lvl="0" indent="0" algn="ctr" rtl="0">
-                        <a:spcBef>
-                          <a:spcPts val="0"/>
-                        </a:spcBef>
-                        <a:spcAft>
-                          <a:spcPts val="0"/>
-                        </a:spcAft>
-                        <a:buNone/>
-                      </a:pPr>
-                      <a:r>
-                        <a:rPr lang="en-US" dirty="0"/>
-                        <a:t>36</a:t>
-                      </a:r>
-                      <a:endParaRPr dirty="0"/>
-                    </a:p>
-                  </a:txBody>
-                  <a:tcPr marL="91425" marR="91425" marT="91425" marB="91425">
-                    <a:lnL w="12700" cap="flat" cmpd="sng" algn="ctr">
-                      <a:solidFill>
-                        <a:schemeClr val="tx1"/>
-                      </a:solidFill>
-                      <a:prstDash val="solid"/>
-                      <a:round/>
-                      <a:headEnd type="none" w="med" len="med"/>
-                      <a:tailEnd type="none" w="med" len="med"/>
-                    </a:lnL>
-                    <a:lnR w="12700" cap="flat" cmpd="sng" algn="ctr">
-                      <a:solidFill>
-                        <a:schemeClr val="tx1"/>
-                      </a:solidFill>
-                      <a:prstDash val="solid"/>
-                      <a:round/>
-                      <a:headEnd type="none" w="med" len="med"/>
-                      <a:tailEnd type="none" w="med" len="med"/>
-                    </a:lnR>
-                    <a:lnT w="12700" cap="flat" cmpd="sng" algn="ctr">
-                      <a:solidFill>
-                        <a:schemeClr val="tx1"/>
-                      </a:solidFill>
-                      <a:prstDash val="solid"/>
-                      <a:round/>
-                      <a:headEnd type="none" w="med" len="med"/>
-                      <a:tailEnd type="none" w="med" len="med"/>
-                    </a:lnT>
-                    <a:lnB w="12700" cap="flat" cmpd="sng" algn="ctr">
-                      <a:solidFill>
-                        <a:schemeClr val="tx1"/>
-                      </a:solidFill>
-                      <a:prstDash val="solid"/>
-                      <a:round/>
-                      <a:headEnd type="none" w="med" len="med"/>
-                      <a:tailEnd type="none" w="med" len="med"/>
-                    </a:lnB>
-                  </a:tcPr>
-                </a:tc>
-                <a:extLst>
-                  <a:ext uri="{0D108BD9-81ED-4DB2-BD59-A6C34878D82A}">
-                    <a16:rowId xmlns:a16="http://schemas.microsoft.com/office/drawing/2014/main" val="10004"/>
-                  </a:ext>
-                </a:extLst>
-              </a:tr>
-              <a:tr h="377308">
-                <a:tc>
-                  <a:txBody>
-                    <a:bodyPr/>
-                    <a:lstStyle/>
-                    <a:p>
-                      <a:pPr marL="0" lvl="0" indent="0" algn="ctr" rtl="0">
-                        <a:spcBef>
-                          <a:spcPts val="0"/>
-                        </a:spcBef>
-                        <a:spcAft>
-                          <a:spcPts val="0"/>
-                        </a:spcAft>
-                        <a:buNone/>
-                      </a:pPr>
-                      <a:r>
-                        <a:rPr lang="en-US" b="1" dirty="0" err="1">
-                          <a:solidFill>
-                            <a:schemeClr val="bg1"/>
-                          </a:solidFill>
-                          <a:latin typeface="Montserrat"/>
-                          <a:ea typeface="Montserrat"/>
-                          <a:cs typeface="Montserrat"/>
-                          <a:sym typeface="Montserrat"/>
-                        </a:rPr>
-                        <a:t>NaRuTagAI</a:t>
-                      </a:r>
-                      <a:endParaRPr b="1" dirty="0">
-                        <a:solidFill>
-                          <a:schemeClr val="bg1"/>
-                        </a:solidFill>
-                        <a:latin typeface="Montserrat"/>
-                        <a:ea typeface="Montserrat"/>
-                        <a:cs typeface="Montserrat"/>
-                        <a:sym typeface="Montserrat"/>
-                      </a:endParaRPr>
-                    </a:p>
-                  </a:txBody>
-                  <a:tcPr marL="91425" marR="91425" marT="91425" marB="91425" anchor="ctr">
-                    <a:lnL w="28575" cap="flat" cmpd="sng">
-                      <a:solidFill>
-                        <a:schemeClr val="dk2">
-                          <a:alpha val="0"/>
-                        </a:schemeClr>
-                      </a:solidFill>
-                      <a:prstDash val="solid"/>
-                      <a:round/>
-                      <a:headEnd type="none" w="sm" len="sm"/>
-                      <a:tailEnd type="none" w="sm" len="sm"/>
-                    </a:lnL>
-                    <a:lnR w="12700" cap="flat" cmpd="sng" algn="ctr">
-                      <a:solidFill>
-                        <a:schemeClr val="tx1"/>
-                      </a:solidFill>
-                      <a:prstDash val="solid"/>
-                      <a:round/>
-                      <a:headEnd type="none" w="med" len="med"/>
-                      <a:tailEnd type="none" w="med" len="med"/>
-                    </a:lnR>
-                    <a:lnT w="28575" cap="flat" cmpd="sng">
-                      <a:solidFill>
-                        <a:schemeClr val="dk2">
-                          <a:alpha val="0"/>
-                        </a:schemeClr>
-                      </a:solidFill>
-                      <a:prstDash val="solid"/>
-                      <a:round/>
-                      <a:headEnd type="none" w="sm" len="sm"/>
-                      <a:tailEnd type="none" w="sm" len="sm"/>
-                    </a:lnT>
-                    <a:lnB w="28575" cap="flat" cmpd="sng">
-                      <a:solidFill>
-                        <a:schemeClr val="dk2">
-                          <a:alpha val="0"/>
-                        </a:schemeClr>
-                      </a:solidFill>
-                      <a:prstDash val="solid"/>
-                      <a:round/>
-                      <a:headEnd type="none" w="sm" len="sm"/>
-                      <a:tailEnd type="none" w="sm" len="sm"/>
-                    </a:lnB>
-                    <a:solidFill>
-                      <a:schemeClr val="bg2">
-                        <a:lumMod val="50000"/>
-                      </a:schemeClr>
-                    </a:solidFill>
-                  </a:tcPr>
-                </a:tc>
-                <a:tc>
-                  <a:txBody>
-                    <a:bodyPr/>
-                    <a:lstStyle/>
-                    <a:p>
-                      <a:pPr marL="0" lvl="0" indent="0" algn="ctr" rtl="0">
-                        <a:spcBef>
-                          <a:spcPts val="0"/>
-                        </a:spcBef>
-                        <a:spcAft>
-                          <a:spcPts val="0"/>
-                        </a:spcAft>
-                        <a:buNone/>
-                      </a:pPr>
-                      <a:r>
-                        <a:rPr lang="ru-RU" dirty="0"/>
-                        <a:t>0.80</a:t>
-                      </a:r>
-                      <a:endParaRPr dirty="0"/>
-                    </a:p>
-                  </a:txBody>
-                  <a:tcPr marL="91425" marR="91425" marT="91425" marB="91425">
-                    <a:lnL w="12700" cap="flat" cmpd="sng" algn="ctr">
-                      <a:solidFill>
-                        <a:schemeClr val="tx1"/>
-                      </a:solidFill>
-                      <a:prstDash val="solid"/>
-                      <a:round/>
-                      <a:headEnd type="none" w="med" len="med"/>
-                      <a:tailEnd type="none" w="med" len="med"/>
-                    </a:lnL>
-                    <a:lnR w="12700" cap="flat" cmpd="sng" algn="ctr">
-                      <a:solidFill>
-                        <a:schemeClr val="tx1"/>
-                      </a:solidFill>
-                      <a:prstDash val="solid"/>
-                      <a:round/>
-                      <a:headEnd type="none" w="med" len="med"/>
-                      <a:tailEnd type="none" w="med" len="med"/>
-                    </a:lnR>
-                    <a:lnT w="12700" cap="flat" cmpd="sng" algn="ctr">
-                      <a:solidFill>
-                        <a:schemeClr val="tx1"/>
-                      </a:solidFill>
-                      <a:prstDash val="solid"/>
-                      <a:round/>
-                      <a:headEnd type="none" w="med" len="med"/>
-                      <a:tailEnd type="none" w="med" len="med"/>
-                    </a:lnT>
-                    <a:lnB w="12700" cap="flat" cmpd="sng" algn="ctr">
-                      <a:solidFill>
-                        <a:schemeClr val="tx1"/>
-                      </a:solidFill>
-                      <a:prstDash val="solid"/>
-                      <a:round/>
-                      <a:headEnd type="none" w="med" len="med"/>
-                      <a:tailEnd type="none" w="med" len="med"/>
-                    </a:lnB>
-                  </a:tcPr>
-                </a:tc>
-                <a:tc>
-                  <a:txBody>
-                    <a:bodyPr/>
-                    <a:lstStyle/>
-                    <a:p>
-                      <a:pPr marL="0" lvl="0" indent="0" algn="ctr" rtl="0">
-                        <a:spcBef>
-                          <a:spcPts val="0"/>
-                        </a:spcBef>
-                        <a:spcAft>
-                          <a:spcPts val="0"/>
-                        </a:spcAft>
-                        <a:buNone/>
-                      </a:pPr>
-                      <a:r>
-                        <a:rPr lang="en-US" dirty="0"/>
-                        <a:t>38</a:t>
-                      </a:r>
-                      <a:endParaRPr dirty="0"/>
-                    </a:p>
-                  </a:txBody>
-                  <a:tcPr marL="91425" marR="91425" marT="91425" marB="91425">
-                    <a:lnL w="12700" cap="flat" cmpd="sng" algn="ctr">
-                      <a:solidFill>
-                        <a:schemeClr val="tx1"/>
-                      </a:solidFill>
-                      <a:prstDash val="solid"/>
-                      <a:round/>
-                      <a:headEnd type="none" w="med" len="med"/>
-                      <a:tailEnd type="none" w="med" len="med"/>
-                    </a:lnL>
-                    <a:lnR w="12700" cap="flat" cmpd="sng" algn="ctr">
-                      <a:solidFill>
-                        <a:schemeClr val="tx1"/>
-                      </a:solidFill>
-                      <a:prstDash val="solid"/>
-                      <a:round/>
-                      <a:headEnd type="none" w="med" len="med"/>
-                      <a:tailEnd type="none" w="med" len="med"/>
-                    </a:lnR>
-                    <a:lnT w="12700" cap="flat" cmpd="sng" algn="ctr">
-                      <a:solidFill>
-                        <a:schemeClr val="tx1"/>
-                      </a:solidFill>
-                      <a:prstDash val="solid"/>
-                      <a:round/>
-                      <a:headEnd type="none" w="med" len="med"/>
-                      <a:tailEnd type="none" w="med" len="med"/>
-                    </a:lnT>
-                    <a:lnB w="12700" cap="flat" cmpd="sng" algn="ctr">
-                      <a:solidFill>
-                        <a:schemeClr val="tx1"/>
-                      </a:solidFill>
-                      <a:prstDash val="solid"/>
-                      <a:round/>
-                      <a:headEnd type="none" w="med" len="med"/>
-                      <a:tailEnd type="none" w="med" len="med"/>
-                    </a:lnB>
-                  </a:tcPr>
-                </a:tc>
-                <a:extLst>
-                  <a:ext uri="{0D108BD9-81ED-4DB2-BD59-A6C34878D82A}">
-                    <a16:rowId xmlns:a16="http://schemas.microsoft.com/office/drawing/2014/main" val="10005"/>
-                  </a:ext>
-                </a:extLst>
-              </a:tr>
-            </a:tbl>
-          </a:graphicData>
-        </a:graphic>
-      </p:graphicFrame>
-      <p:pic>
-        <p:nvPicPr>
-          <p:cNvPr id="14" name="Рисунок 13">
-            <a:extLst>
-              <a:ext uri="{FF2B5EF4-FFF2-40B4-BE49-F238E27FC236}">
-                <a16:creationId xmlns:a16="http://schemas.microsoft.com/office/drawing/2014/main" id="{E4FFE5EF-D5EB-4207-BD25-00DB12C434CC}"/>
-              </a:ext>
-            </a:extLst>
-          </p:cNvPr>
-          <p:cNvPicPr>
-            <a:picLocks noChangeAspect="1"/>
-          </p:cNvPicPr>
-          <p:nvPr/>
-        </p:nvPicPr>
-        <p:blipFill>
-          <a:blip r:embed="rId4"/>
-          <a:stretch>
-            <a:fillRect/>
-          </a:stretch>
-        </p:blipFill>
-        <p:spPr>
-          <a:xfrm>
-            <a:off x="259351" y="160617"/>
-            <a:ext cx="976774" cy="1036800"/>
-          </a:xfrm>
-          <a:prstGeom prst="rect">
-            <a:avLst/>
-          </a:prstGeom>
-        </p:spPr>
-      </p:pic>
-    </p:spTree>
-  </p:cSld>
-  <p:clrMapOvr>
-    <a:masterClrMapping/>
-  </p:clrMapOvr>
-</p:sld>
-</file>
-
-<file path=ppt/slides/slide7.xml><?xml version="1.0" encoding="utf-8"?>
 <p:sld xmlns:a="http://schemas.openxmlformats.org/drawingml/2006/main" xmlns:r="http://schemas.openxmlformats.org/officeDocument/2006/relationships" xmlns:p="http://schemas.openxmlformats.org/presentationml/2006/main">
   <p:cSld>
     <p:spTree>
@@ -11904,10 +9965,6 @@
               </a:spcAft>
               <a:buNone/>
             </a:pPr>
-            <a:r>
-              <a:rPr lang="ru-RU" dirty="0"/>
-              <a:t>Масштабирование разработки</a:t>
-            </a:r>
             <a:endParaRPr dirty="0"/>
           </a:p>
         </p:txBody>
@@ -12362,18 +10419,6 @@
               <a:rPr lang="ru-RU" sz="1400" b="1" dirty="0" err="1"/>
               <a:t>микросервис</a:t>
             </a:r>
-            <a:r>
-              <a:rPr lang="ru-RU" sz="1400" b="1" dirty="0"/>
-              <a:t> с функцией </a:t>
-            </a:r>
-            <a:r>
-              <a:rPr lang="ru-RU" sz="1400" b="1" dirty="0" err="1"/>
-              <a:t>дообучения</a:t>
-            </a:r>
-            <a:r>
-              <a:rPr lang="ru-RU" sz="1400" b="1" dirty="0"/>
-              <a:t> модели.</a:t>
-            </a:r>
             <a:endParaRPr sz="1400" dirty="0">
               <a:solidFill>
                 <a:schemeClr val="dk1"/>
@@ -12430,7 +10475,7 @@
                   <a:schemeClr val="bg1"/>
                 </a:solidFill>
               </a:rPr>
-              <a:t>парсер: запуск, прогнозирование, завершение</a:t>
+              <a:t>парсер</a:t>
             </a:r>
           </a:p>
         </p:txBody>
@@ -12584,7 +10629,7 @@
 </p:sld>
 </file>
 
-<file path=ppt/slides/slide8.xml><?xml version="1.0" encoding="utf-8"?>
+<file path=ppt/slides/slide7.xml><?xml version="1.0" encoding="utf-8"?>
 <p:sld xmlns:a="http://schemas.openxmlformats.org/drawingml/2006/main" xmlns:r="http://schemas.openxmlformats.org/officeDocument/2006/relationships" xmlns:p="http://schemas.openxmlformats.org/presentationml/2006/main">
   <p:cSld>
     <p:spTree>
